--- a/images/logo.pptx
+++ b/images/logo.pptx
@@ -9,7 +9,8 @@
     <p:sldId id="257" r:id="rId3"/>
     <p:sldId id="258" r:id="rId4"/>
     <p:sldId id="260" r:id="rId5"/>
-    <p:sldId id="259" r:id="rId6"/>
+    <p:sldId id="261" r:id="rId6"/>
+    <p:sldId id="259" r:id="rId7"/>
   </p:sldIdLst>
   <p:sldSz cx="12192000" cy="6858000"/>
   <p:notesSz cx="6858000" cy="9144000"/>
@@ -482,7 +483,7 @@
           <a:p>
             <a:fld id="{70508A58-EBBD-6F4C-84C4-349B94FCD322}" type="datetimeFigureOut">
               <a:rPr lang="en-US" smtClean="0"/>
-              <a:t>11/11/22</a:t>
+              <a:t>4/19/23</a:t>
             </a:fld>
             <a:endParaRPr lang="en-US"/>
           </a:p>
@@ -682,7 +683,7 @@
           <a:p>
             <a:fld id="{70508A58-EBBD-6F4C-84C4-349B94FCD322}" type="datetimeFigureOut">
               <a:rPr lang="en-US" smtClean="0"/>
-              <a:t>11/11/22</a:t>
+              <a:t>4/19/23</a:t>
             </a:fld>
             <a:endParaRPr lang="en-US"/>
           </a:p>
@@ -892,7 +893,7 @@
           <a:p>
             <a:fld id="{70508A58-EBBD-6F4C-84C4-349B94FCD322}" type="datetimeFigureOut">
               <a:rPr lang="en-US" smtClean="0"/>
-              <a:t>11/11/22</a:t>
+              <a:t>4/19/23</a:t>
             </a:fld>
             <a:endParaRPr lang="en-US"/>
           </a:p>
@@ -1092,7 +1093,7 @@
           <a:p>
             <a:fld id="{70508A58-EBBD-6F4C-84C4-349B94FCD322}" type="datetimeFigureOut">
               <a:rPr lang="en-US" smtClean="0"/>
-              <a:t>11/11/22</a:t>
+              <a:t>4/19/23</a:t>
             </a:fld>
             <a:endParaRPr lang="en-US"/>
           </a:p>
@@ -1368,7 +1369,7 @@
           <a:p>
             <a:fld id="{70508A58-EBBD-6F4C-84C4-349B94FCD322}" type="datetimeFigureOut">
               <a:rPr lang="en-US" smtClean="0"/>
-              <a:t>11/11/22</a:t>
+              <a:t>4/19/23</a:t>
             </a:fld>
             <a:endParaRPr lang="en-US"/>
           </a:p>
@@ -1636,7 +1637,7 @@
           <a:p>
             <a:fld id="{70508A58-EBBD-6F4C-84C4-349B94FCD322}" type="datetimeFigureOut">
               <a:rPr lang="en-US" smtClean="0"/>
-              <a:t>11/11/22</a:t>
+              <a:t>4/19/23</a:t>
             </a:fld>
             <a:endParaRPr lang="en-US"/>
           </a:p>
@@ -2051,7 +2052,7 @@
           <a:p>
             <a:fld id="{70508A58-EBBD-6F4C-84C4-349B94FCD322}" type="datetimeFigureOut">
               <a:rPr lang="en-US" smtClean="0"/>
-              <a:t>11/11/22</a:t>
+              <a:t>4/19/23</a:t>
             </a:fld>
             <a:endParaRPr lang="en-US"/>
           </a:p>
@@ -2193,7 +2194,7 @@
           <a:p>
             <a:fld id="{70508A58-EBBD-6F4C-84C4-349B94FCD322}" type="datetimeFigureOut">
               <a:rPr lang="en-US" smtClean="0"/>
-              <a:t>11/11/22</a:t>
+              <a:t>4/19/23</a:t>
             </a:fld>
             <a:endParaRPr lang="en-US"/>
           </a:p>
@@ -2306,7 +2307,7 @@
           <a:p>
             <a:fld id="{70508A58-EBBD-6F4C-84C4-349B94FCD322}" type="datetimeFigureOut">
               <a:rPr lang="en-US" smtClean="0"/>
-              <a:t>11/11/22</a:t>
+              <a:t>4/19/23</a:t>
             </a:fld>
             <a:endParaRPr lang="en-US"/>
           </a:p>
@@ -2619,7 +2620,7 @@
           <a:p>
             <a:fld id="{70508A58-EBBD-6F4C-84C4-349B94FCD322}" type="datetimeFigureOut">
               <a:rPr lang="en-US" smtClean="0"/>
-              <a:t>11/11/22</a:t>
+              <a:t>4/19/23</a:t>
             </a:fld>
             <a:endParaRPr lang="en-US"/>
           </a:p>
@@ -2908,7 +2909,7 @@
           <a:p>
             <a:fld id="{70508A58-EBBD-6F4C-84C4-349B94FCD322}" type="datetimeFigureOut">
               <a:rPr lang="en-US" smtClean="0"/>
-              <a:t>11/11/22</a:t>
+              <a:t>4/19/23</a:t>
             </a:fld>
             <a:endParaRPr lang="en-US"/>
           </a:p>
@@ -3151,7 +3152,7 @@
           <a:p>
             <a:fld id="{70508A58-EBBD-6F4C-84C4-349B94FCD322}" type="datetimeFigureOut">
               <a:rPr lang="en-US" smtClean="0"/>
-              <a:t>11/11/22</a:t>
+              <a:t>4/19/23</a:t>
             </a:fld>
             <a:endParaRPr lang="en-US"/>
           </a:p>
@@ -4420,6 +4421,135 @@
 </file>
 
 <file path=ppt/slides/slide5.xml><?xml version="1.0" encoding="utf-8"?>
+<p:sld xmlns:a="http://schemas.openxmlformats.org/drawingml/2006/main" xmlns:r="http://schemas.openxmlformats.org/officeDocument/2006/relationships" xmlns:p="http://schemas.openxmlformats.org/presentationml/2006/main">
+  <p:cSld>
+    <p:spTree>
+      <p:nvGrpSpPr>
+        <p:cNvPr id="1" name=""/>
+        <p:cNvGrpSpPr/>
+        <p:nvPr/>
+      </p:nvGrpSpPr>
+      <p:grpSpPr>
+        <a:xfrm>
+          <a:off x="0" y="0"/>
+          <a:ext cx="0" cy="0"/>
+          <a:chOff x="0" y="0"/>
+          <a:chExt cx="0" cy="0"/>
+        </a:xfrm>
+      </p:grpSpPr>
+      <p:grpSp>
+        <p:nvGrpSpPr>
+          <p:cNvPr id="12" name="Group 11">
+            <a:extLst>
+              <a:ext uri="{FF2B5EF4-FFF2-40B4-BE49-F238E27FC236}">
+                <a16:creationId xmlns:a16="http://schemas.microsoft.com/office/drawing/2014/main" id="{C42AEB62-7212-E0CC-1D82-910425582F60}"/>
+              </a:ext>
+            </a:extLst>
+          </p:cNvPr>
+          <p:cNvGrpSpPr/>
+          <p:nvPr/>
+        </p:nvGrpSpPr>
+        <p:grpSpPr>
+          <a:xfrm>
+            <a:off x="3429498" y="1907627"/>
+            <a:ext cx="4131137" cy="1327018"/>
+            <a:chOff x="7012390" y="4107724"/>
+            <a:chExt cx="4131137" cy="1327018"/>
+          </a:xfrm>
+        </p:grpSpPr>
+        <p:sp>
+          <p:nvSpPr>
+            <p:cNvPr id="7" name="TextBox 6">
+              <a:extLst>
+                <a:ext uri="{FF2B5EF4-FFF2-40B4-BE49-F238E27FC236}">
+                  <a16:creationId xmlns:a16="http://schemas.microsoft.com/office/drawing/2014/main" id="{EA0FFEE8-BAE5-EDFD-0BAE-ACEED8E5DE62}"/>
+                </a:ext>
+              </a:extLst>
+            </p:cNvPr>
+            <p:cNvSpPr txBox="1"/>
+            <p:nvPr/>
+          </p:nvSpPr>
+          <p:spPr>
+            <a:xfrm>
+              <a:off x="7012390" y="4487060"/>
+              <a:ext cx="4131137" cy="830997"/>
+            </a:xfrm>
+            <a:prstGeom prst="rect">
+              <a:avLst/>
+            </a:prstGeom>
+            <a:noFill/>
+          </p:spPr>
+          <p:txBody>
+            <a:bodyPr wrap="square" rtlCol="0">
+              <a:spAutoFit/>
+            </a:bodyPr>
+            <a:lstStyle/>
+            <a:p>
+              <a:r>
+                <a:rPr lang="en-US" sz="4800" dirty="0">
+                  <a:ln w="0"/>
+                  <a:solidFill>
+                    <a:srgbClr val="FF0000"/>
+                  </a:solidFill>
+                  <a:effectLst>
+                    <a:outerShdw blurRad="38100" dist="25400" dir="5400000" algn="ctr" rotWithShape="0">
+                      <a:srgbClr val="6E747A">
+                        <a:alpha val="43000"/>
+                      </a:srgbClr>
+                    </a:outerShdw>
+                  </a:effectLst>
+                  <a:latin typeface="Apple Chancery" panose="03020702040506060504" pitchFamily="66" charset="-79"/>
+                  <a:cs typeface="Apple Chancery" panose="03020702040506060504" pitchFamily="66" charset="-79"/>
+                </a:rPr>
+                <a:t>Numeracy</a:t>
+              </a:r>
+            </a:p>
+          </p:txBody>
+        </p:sp>
+        <p:pic>
+          <p:nvPicPr>
+            <p:cNvPr id="8" name="Picture 7" descr="Logo&#10;&#10;Description automatically generated">
+              <a:extLst>
+                <a:ext uri="{FF2B5EF4-FFF2-40B4-BE49-F238E27FC236}">
+                  <a16:creationId xmlns:a16="http://schemas.microsoft.com/office/drawing/2014/main" id="{AB585442-4024-C95C-6EBD-CBB5A2407924}"/>
+                </a:ext>
+              </a:extLst>
+            </p:cNvPr>
+            <p:cNvPicPr>
+              <a:picLocks noChangeAspect="1"/>
+            </p:cNvPicPr>
+            <p:nvPr/>
+          </p:nvPicPr>
+          <p:blipFill rotWithShape="1">
+            <a:blip r:embed="rId2"/>
+            <a:srcRect l="68157" t="30215" r="9721" b="30900"/>
+            <a:stretch/>
+          </p:blipFill>
+          <p:spPr>
+            <a:xfrm>
+              <a:off x="9996617" y="4107724"/>
+              <a:ext cx="1079017" cy="1327018"/>
+            </a:xfrm>
+            <a:prstGeom prst="rect">
+              <a:avLst/>
+            </a:prstGeom>
+          </p:spPr>
+        </p:pic>
+      </p:grpSp>
+    </p:spTree>
+    <p:extLst>
+      <p:ext uri="{BB962C8B-B14F-4D97-AF65-F5344CB8AC3E}">
+        <p14:creationId xmlns:p14="http://schemas.microsoft.com/office/powerpoint/2010/main" val="870616929"/>
+      </p:ext>
+    </p:extLst>
+  </p:cSld>
+  <p:clrMapOvr>
+    <a:masterClrMapping/>
+  </p:clrMapOvr>
+</p:sld>
+</file>
+
+<file path=ppt/slides/slide6.xml><?xml version="1.0" encoding="utf-8"?>
 <p:sld xmlns:a="http://schemas.openxmlformats.org/drawingml/2006/main" xmlns:r="http://schemas.openxmlformats.org/officeDocument/2006/relationships" xmlns:p="http://schemas.openxmlformats.org/presentationml/2006/main">
   <p:cSld>
     <p:spTree>
